--- a/decks/englit-inspector/englit-inspector_ch5_inspector-and-ending.pptx
+++ b/decks/englit-inspector/englit-inspector_ch5_inspector-and-ending.pptx
@@ -128,29 +128,29 @@
   <p:extLst>
     <p:ext uri="{521415D9-36F7-43E2-AB2F-B90AF26B5E84}">
       <p14:sectionLst xmlns:p14="http://schemas.microsoft.com/office/powerpoint/2010/main">
-        <p14:section name="Opening" id="{0c2b0caf-69fa-2ebd-3661-b4028d4baa55}">
+        <p14:section name="Opening" id="{49e754ce-e521-0b7b-f749-dad5cc702dcc}">
           <p14:sldIdLst>
             <p14:sldId id="256"/>
           </p14:sldIdLst>
         </p14:section>
-        <p14:section name="Gate" id="{cd8fe767-ba7c-0fea-d059-945d9a25835e}">
+        <p14:section name="Gate" id="{4c59a6e9-076f-8593-5c00-0e06c6ce0e6a}">
           <p14:sldIdLst>
             <p14:sldId id="257"/>
             <p14:sldId id="258"/>
           </p14:sldIdLst>
         </p14:section>
-        <p14:section name="Pre-teach" id="{318da11a-56d1-af1b-a6ed-be3084ed05d6}">
+        <p14:section name="Pre-teach" id="{a7342bff-ddab-be26-0703-c04e78024ff6}">
           <p14:sldIdLst>
             <p14:sldId id="259"/>
           </p14:sldIdLst>
         </p14:section>
-        <p14:section name="Read-along" id="{cae86dbc-d353-d108-ef50-2c9e827cf12d}">
+        <p14:section name="Read-along" id="{433eee8b-dfea-b1ad-e3f4-b9449af83bf6}">
           <p14:sldIdLst>
             <p14:sldId id="260"/>
             <p14:sldId id="261"/>
           </p14:sldIdLst>
         </p14:section>
-        <p14:section name="Teach" id="{05ae5c62-5452-4da8-aaf8-bc32519c1fc3}">
+        <p14:section name="Teach" id="{97b2fdc8-c8ae-28db-f67c-d7090621ca33}">
           <p14:sldIdLst>
             <p14:sldId id="262"/>
             <p14:sldId id="263"/>
@@ -158,7 +158,7 @@
             <p14:sldId id="265"/>
           </p14:sldIdLst>
         </p14:section>
-        <p14:section name="Routes" id="{0a5cfa97-7215-3038-4376-165df2820412}">
+        <p14:section name="Routes" id="{67d10a22-cf9d-1ac2-a3c6-84dd58f89b9d}">
           <p14:sldIdLst>
             <p14:sldId id="266"/>
             <p14:sldId id="267"/>
@@ -169,12 +169,12 @@
             <p14:sldId id="272"/>
           </p14:sldIdLst>
         </p14:section>
-        <p14:section name="Close" id="{7ba56e5a-4b68-e1da-0bce-cb9b498622ae}">
+        <p14:section name="Close" id="{93b9f3a5-f8ef-f87e-527d-57bf6c537750}">
           <p14:sldIdLst>
             <p14:sldId id="273"/>
           </p14:sldIdLst>
         </p14:section>
-        <p14:section name="Answers" id="{088cc5d7-2d8e-ca64-cf3f-fc47a840e319}">
+        <p14:section name="Answers" id="{c91b73fd-13f8-bd0a-2c43-bd50c965204a}">
           <p14:sldIdLst>
             <p14:sldId id="274"/>
             <p14:sldId id="275"/>
@@ -1429,7 +1429,7 @@
               <a:rPr lang="en-US" dirty="0"/>
               <a:t>Exit ticket — individual, silent, on a slip or mini-whiteboard. Recall before help: no notes, no lanes, no hints. Collect before pupils leave.
 Question: Why does Priestley end the play with the telephone ringing and a second inspector on his way, rather than with the Inspector's final speech?
-Answer: B   So that the Birlings, and the audience, must face the lesson again, and we see who has learned it and who has not. The twist ending turns the play into a loop. The Inspector's speech was the lesson; the telephone call is the test, and the family fails it in two different ways.
+Answer: D   So that the Birlings, and the audience, must face the lesson again, and we see who has learned it and who has not. The twist ending turns the play into a loop. The Inspector's speech was the lesson; the telephone call is the test, and the family fails it in two different ways.
 Source of this question: module 3 task ("Why end with a telephone?") from the manifest.
 Sort the slips: correct → ready to move on; incorrect → start next lesson in the pre-teach group, with the read-along and the Support lane. Same destination next time.</a:t>
             </a:r>
@@ -1613,7 +1613,7 @@
             <a:r>
               <a:rPr lang="en-US" dirty="0"/>
               <a:t>Do now — retrieval. Silent, no notes, no help: recall comes before any support. Give about four minutes.
-1. Which of these does NOT happen after the Inspector leaves?  →  D   Eva Smith walks in alive and explains the whole evening
+1. Which of these does NOT happen after the Inspector leaves?  →  C   Eva Smith walks in alive and explains the whole evening
 2. The Inspector's name, Goole, sounds like the word ___, which means a spirit that feeds on the dead.  →  ghoul
 3. The play is set in 1912. The Inspector's warning about war came true when the First World War began. How many years after the play's setting was that?  →  2 years
 Circulate: who gets 3/3 (Stretch route), 2/3 (Core), 0–1 (Support)? Use this to route pupils later in the lesson.</a:t>
@@ -1889,7 +1889,7 @@
             <a:r>
               <a:rPr lang="en-US" dirty="0"/>
               <a:t>Answers — exit ticket: Exit ticket. Reveal the answer; pupils mark their own work in a different colour, then read the "why" together. Same destination for every lane, so one answer serves the whole class.
-Answer: B   So that the Birlings, and the audience, must face the lesson again, and we see who has learned it and who has not
+Answer: D   So that the Birlings, and the audience, must face the lesson again, and we see who has learned it and who has not
 Why: The twist ending turns the play into a loop. The Inspector's speech was the lesson; the telephone call is the test, and the family fails it in two different ways.
 Ask a Support pupil to explain one step, and a Stretch pupil to share their extension.</a:t>
             </a:r>
@@ -1980,7 +1980,7 @@
             <a:r>
               <a:rPr lang="en-US" dirty="0"/>
               <a:t>Answers — pupils mark their own in a different colour, then hands up for 3/3, 2/3, 1/3.
-1. D   Eva Smith walks in alive and explains the whole evening. Eva never appears on stage; she is dead before the play begins and remains unseen. The other three things all happen, and they build the false relief that the final telephone call destroys.
+1. C   Eva Smith walks in alive and explains the whole evening. Eva never appears on stage; she is dead before the play begins and remains unseen. The other three things all happen, and they build the false relief that the final telephone call destroys.
 2. ghoul. Priestley chose a name that sounds like a creature from the grave. It is one piece of evidence for reading the Inspector as a ghost or a visitor from beyond the natural world.
 3. 2 years. The First World War began in August 1914, two years after the spring of 1912. Birling's promise of peace and the Inspector's warning are both tested within two years.
 Say the route each score points to: 3/3 Stretch, 2/3 Core, 0–1 Support. Pupils may choose to move up.</a:t>
@@ -10196,7 +10196,7 @@
                 <a:ea typeface="Calibri" pitchFamily="34" charset="-122"/>
                 <a:cs typeface="Calibri" pitchFamily="34" charset="-120"/>
               </a:rPr>
-              <a:t>To set up a sequel in which the real inspector investigates</a:t>
+              <a:t>To prove that Inspector Goole was a real policeman after all</a:t>
             </a:r>
             <a:endParaRPr lang="en-US" sz="2200" dirty="0"/>
           </a:p>
@@ -10233,7 +10233,7 @@
                 <a:ea typeface="Calibri" pitchFamily="34" charset="-122"/>
                 <a:cs typeface="Calibri" pitchFamily="34" charset="-120"/>
               </a:rPr>
-              <a:t>So that the Birlings, and the audience, must face the lesson again, and we see who has learned it and who has not</a:t>
+              <a:t>Because audiences in 1945 expected every play to end happily</a:t>
             </a:r>
             <a:endParaRPr lang="en-US" sz="2200" dirty="0"/>
           </a:p>
@@ -10270,7 +10270,7 @@
                 <a:ea typeface="Calibri" pitchFamily="34" charset="-122"/>
                 <a:cs typeface="Calibri" pitchFamily="34" charset="-120"/>
               </a:rPr>
-              <a:t>To prove that Inspector Goole was a real policeman after all</a:t>
+              <a:t>To set up a sequel in which the real inspector investigates</a:t>
             </a:r>
             <a:endParaRPr lang="en-US" sz="2200" dirty="0"/>
           </a:p>
@@ -10307,7 +10307,7 @@
                 <a:ea typeface="Calibri" pitchFamily="34" charset="-122"/>
                 <a:cs typeface="Calibri" pitchFamily="34" charset="-120"/>
               </a:rPr>
-              <a:t>Because audiences in 1945 expected every play to end happily</a:t>
+              <a:t>So that the Birlings, and the audience, must face the lesson again, and we see who has learned it and who has not</a:t>
             </a:r>
             <a:endParaRPr lang="en-US" sz="2200" dirty="0"/>
           </a:p>
@@ -11454,7 +11454,7 @@
                 <a:ea typeface="Calibri" pitchFamily="34" charset="-122"/>
                 <a:cs typeface="Calibri" pitchFamily="34" charset="-120"/>
               </a:rPr>
-              <a:t>Gerald suggests that they may each have been shown a photograph of a different girl</a:t>
+              <a:t>Eva Smith walks in alive and explains the whole evening</a:t>
             </a:r>
             <a:endParaRPr lang="en-US" sz="1800" dirty="0"/>
           </a:p>
@@ -11491,7 +11491,7 @@
                 <a:ea typeface="Calibri" pitchFamily="34" charset="-122"/>
                 <a:cs typeface="Calibri" pitchFamily="34" charset="-120"/>
               </a:rPr>
-              <a:t>Eva Smith walks in alive and explains the whole evening</a:t>
+              <a:t>Gerald suggests that they may each have been shown a photograph of a different girl</a:t>
             </a:r>
             <a:endParaRPr lang="en-US" sz="1800" dirty="0"/>
           </a:p>
@@ -13152,7 +13152,7 @@
                 <a:ea typeface="Cambria" pitchFamily="34" charset="-122"/>
                 <a:cs typeface="Cambria" pitchFamily="34" charset="-120"/>
               </a:rPr>
-              <a:t>B   So that the Birlings, and the audience, must face the lesson again, and we see who has learned it and who has not</a:t>
+              <a:t>D   So that the Birlings, and the audience, must face the lesson again, and we see who has learned it and who has not</a:t>
             </a:r>
             <a:endParaRPr lang="en-US" sz="1800" dirty="0"/>
           </a:p>
@@ -13673,7 +13673,7 @@
                 <a:ea typeface="Calibri" pitchFamily="34" charset="-122"/>
                 <a:cs typeface="Calibri" pitchFamily="34" charset="-120"/>
               </a:rPr>
-              <a:t>D   Eva Smith walks in alive and explains the whole evening</a:t>
+              <a:t>C   Eva Smith walks in alive and explains the whole evening</a:t>
             </a:r>
             <a:endParaRPr lang="en-US" sz="2200" dirty="0"/>
           </a:p>

--- a/decks/englit-inspector/englit-inspector_ch5_inspector-and-ending.pptx
+++ b/decks/englit-inspector/englit-inspector_ch5_inspector-and-ending.pptx
@@ -128,29 +128,29 @@
   <p:extLst>
     <p:ext uri="{521415D9-36F7-43E2-AB2F-B90AF26B5E84}">
       <p14:sectionLst xmlns:p14="http://schemas.microsoft.com/office/powerpoint/2010/main">
-        <p14:section name="Opening" id="{49e754ce-e521-0b7b-f749-dad5cc702dcc}">
+        <p14:section name="Opening" id="{7deb9ce1-7e64-2fef-2853-7e07447d66f5}">
           <p14:sldIdLst>
             <p14:sldId id="256"/>
           </p14:sldIdLst>
         </p14:section>
-        <p14:section name="Gate" id="{4c59a6e9-076f-8593-5c00-0e06c6ce0e6a}">
+        <p14:section name="Gate" id="{59744d92-c38a-e695-68c9-527abdd69e7f}">
           <p14:sldIdLst>
             <p14:sldId id="257"/>
             <p14:sldId id="258"/>
           </p14:sldIdLst>
         </p14:section>
-        <p14:section name="Pre-teach" id="{a7342bff-ddab-be26-0703-c04e78024ff6}">
+        <p14:section name="Pre-teach" id="{2d56e6df-6ac9-2d7c-a59f-f75ec3e3eeab}">
           <p14:sldIdLst>
             <p14:sldId id="259"/>
           </p14:sldIdLst>
         </p14:section>
-        <p14:section name="Read-along" id="{433eee8b-dfea-b1ad-e3f4-b9449af83bf6}">
+        <p14:section name="Read-along" id="{19773277-c2f7-e92e-40cb-bc8d46e67c2b}">
           <p14:sldIdLst>
             <p14:sldId id="260"/>
             <p14:sldId id="261"/>
           </p14:sldIdLst>
         </p14:section>
-        <p14:section name="Teach" id="{97b2fdc8-c8ae-28db-f67c-d7090621ca33}">
+        <p14:section name="Teach" id="{51097a02-ca0e-139b-9f32-5820148a66d7}">
           <p14:sldIdLst>
             <p14:sldId id="262"/>
             <p14:sldId id="263"/>
@@ -158,7 +158,7 @@
             <p14:sldId id="265"/>
           </p14:sldIdLst>
         </p14:section>
-        <p14:section name="Routes" id="{67d10a22-cf9d-1ac2-a3c6-84dd58f89b9d}">
+        <p14:section name="Routes" id="{c2a0d9ae-1ffe-6e8b-7b7b-e7ad9297590e}">
           <p14:sldIdLst>
             <p14:sldId id="266"/>
             <p14:sldId id="267"/>
@@ -169,12 +169,12 @@
             <p14:sldId id="272"/>
           </p14:sldIdLst>
         </p14:section>
-        <p14:section name="Close" id="{93b9f3a5-f8ef-f87e-527d-57bf6c537750}">
+        <p14:section name="Close" id="{55b7e591-4d39-6313-e5b4-fd59d13a2fef}">
           <p14:sldIdLst>
             <p14:sldId id="273"/>
           </p14:sldIdLst>
         </p14:section>
-        <p14:section name="Answers" id="{c91b73fd-13f8-bd0a-2c43-bd50c965204a}">
+        <p14:section name="Answers" id="{3e90c8e1-61cb-eb1e-69ee-f3ff57870cb2}">
           <p14:sldIdLst>
             <p14:sldId id="274"/>
             <p14:sldId id="275"/>
